--- a/MK4/MK4_LLM_발표자료.pptx
+++ b/MK4/MK4_LLM_발표자료.pptx
@@ -412,7 +412,7 @@
             <a:pPr indent="0" algn="r">
               <a:buNone/>
             </a:pPr>
-            <a:fld id="{34FC413C-2ACC-417E-BDD7-9F1188CDFF73}" type="slidenum">
+            <a:fld id="{D72A0A43-EA9F-47E3-A252-8C0C75F116DB}" type="slidenum">
               <a:rPr lang="en-US" sz="1400" b="0" u="none" strike="noStrike">
                 <a:solidFill>
                   <a:srgbClr val="000000"/>
@@ -579,7 +579,7 @@
                 <a:tab pos="0" algn="l"/>
               </a:tabLst>
             </a:pPr>
-            <a:fld id="{F8A8D180-0308-4232-A27F-659FB7EAC1DF}" type="slidenum">
+            <a:fld id="{2FFBD217-46DF-474C-9188-36A6669B9C67}" type="slidenum">
               <a:rPr lang="en-US" sz="1200" b="0" u="none" strike="noStrike">
                 <a:solidFill>
                   <a:schemeClr val="dk1"/>
@@ -740,7 +740,7 @@
               </a:lnSpc>
               <a:buNone/>
             </a:pPr>
-            <a:fld id="{17E934A2-1EF9-4770-9AFB-6E5B861A320C}" type="slidenum">
+            <a:fld id="{9D53FB44-53AC-4A32-A378-90E8BF4013F3}" type="slidenum">
               <a:rPr lang="en-US" sz="1200" b="0" u="none" strike="noStrike">
                 <a:solidFill>
                   <a:schemeClr val="dk1"/>
@@ -901,7 +901,7 @@
               </a:lnSpc>
               <a:buNone/>
             </a:pPr>
-            <a:fld id="{470A37A3-43FA-4D71-B5B6-3AAADE9D00DC}" type="slidenum">
+            <a:fld id="{08C74E89-8751-4E0D-ADA6-33ED99272EB1}" type="slidenum">
               <a:rPr lang="en-US" sz="1200" b="0" u="none" strike="noStrike">
                 <a:solidFill>
                   <a:schemeClr val="dk1"/>
@@ -1068,7 +1068,7 @@
                 <a:tab pos="0" algn="l"/>
               </a:tabLst>
             </a:pPr>
-            <a:fld id="{70285F22-65EE-4E7C-BE90-C911A046F2B1}" type="slidenum">
+            <a:fld id="{62C62EA2-9289-49F8-B712-169A9C26FD1E}" type="slidenum">
               <a:rPr lang="en-US" sz="1200" b="0" u="none" strike="noStrike">
                 <a:solidFill>
                   <a:schemeClr val="dk1"/>
@@ -1235,7 +1235,7 @@
                 <a:tab pos="0" algn="l"/>
               </a:tabLst>
             </a:pPr>
-            <a:fld id="{0C25237C-01C7-4563-A6D7-EC760C5C55D5}" type="slidenum">
+            <a:fld id="{7BD59EF2-2C7C-4765-9874-49CEEBE547C8}" type="slidenum">
               <a:rPr lang="en-US" sz="1200" b="0" u="none" strike="noStrike">
                 <a:solidFill>
                   <a:schemeClr val="dk1"/>
@@ -1402,7 +1402,7 @@
                 <a:tab pos="0" algn="l"/>
               </a:tabLst>
             </a:pPr>
-            <a:fld id="{C3391CF7-759A-4023-9B3E-1D566468B396}" type="slidenum">
+            <a:fld id="{A1487B53-3321-44BC-B045-584E33288845}" type="slidenum">
               <a:rPr lang="en-US" sz="1200" b="0" u="none" strike="noStrike">
                 <a:solidFill>
                   <a:schemeClr val="dk1"/>
@@ -1569,7 +1569,7 @@
                 <a:tab pos="0" algn="l"/>
               </a:tabLst>
             </a:pPr>
-            <a:fld id="{224352BC-57C7-4AC4-A76D-C02E5F325127}" type="slidenum">
+            <a:fld id="{A7CB50F9-B228-426F-A514-8593D9955048}" type="slidenum">
               <a:rPr lang="en-US" sz="1200" b="0" u="none" strike="noStrike">
                 <a:solidFill>
                   <a:schemeClr val="dk1"/>
@@ -1736,7 +1736,7 @@
                 <a:tab pos="0" algn="l"/>
               </a:tabLst>
             </a:pPr>
-            <a:fld id="{C99CC057-9F30-481E-A18A-98079DB6E0A5}" type="slidenum">
+            <a:fld id="{017CF7C9-105A-495A-AA28-15F018CD64E9}" type="slidenum">
               <a:rPr lang="en-US" sz="1200" b="0" u="none" strike="noStrike">
                 <a:solidFill>
                   <a:schemeClr val="dk1"/>
@@ -1903,7 +1903,7 @@
                 <a:tab pos="0" algn="l"/>
               </a:tabLst>
             </a:pPr>
-            <a:fld id="{952E1388-3F7C-48BF-923D-DABEED8E0C7E}" type="slidenum">
+            <a:fld id="{CA35922C-D8EB-425F-8E3C-695075733B7C}" type="slidenum">
               <a:rPr lang="en-US" sz="1200" b="0" u="none" strike="noStrike">
                 <a:solidFill>
                   <a:schemeClr val="dk1"/>
@@ -2070,7 +2070,7 @@
                 <a:tab pos="0" algn="l"/>
               </a:tabLst>
             </a:pPr>
-            <a:fld id="{22DFEE1C-EC28-4C0E-B005-B0362DCF51AD}" type="slidenum">
+            <a:fld id="{D4509150-23DF-4C6F-92E7-A5BA6C8AD136}" type="slidenum">
               <a:rPr lang="en-US" sz="1200" b="0" u="none" strike="noStrike">
                 <a:solidFill>
                   <a:schemeClr val="dk1"/>
@@ -2080,7 +2080,7 @@
                 <a:latin typeface="+mn-lt"/>
                 <a:ea typeface="+mn-ea"/>
               </a:rPr>
-              <a:t>&lt;숫자&gt;</a:t>
+              <a:t>26</a:t>
             </a:fld>
             <a:endParaRPr lang="en-US" sz="1200" b="0" u="none" strike="noStrike">
               <a:solidFill>
@@ -2237,7 +2237,7 @@
                 <a:tab pos="0" algn="l"/>
               </a:tabLst>
             </a:pPr>
-            <a:fld id="{688F2975-918C-4594-A617-A267F82A339A}" type="slidenum">
+            <a:fld id="{C0613BA6-F614-49E3-AF58-47D605FA9B4B}" type="slidenum">
               <a:rPr lang="en-US" sz="1200" b="0" u="none" strike="noStrike">
                 <a:solidFill>
                   <a:schemeClr val="dk1"/>
@@ -2247,7 +2247,7 @@
                 <a:latin typeface="+mn-lt"/>
                 <a:ea typeface="+mn-ea"/>
               </a:rPr>
-              <a:t>&lt;숫자&gt;</a:t>
+              <a:t>26</a:t>
             </a:fld>
             <a:endParaRPr lang="en-US" sz="1200" b="0" u="none" strike="noStrike">
               <a:solidFill>
@@ -2404,7 +2404,7 @@
                 <a:tab pos="0" algn="l"/>
               </a:tabLst>
             </a:pPr>
-            <a:fld id="{A743FBFA-A345-4B23-A687-B43F5B1B4AF6}" type="slidenum">
+            <a:fld id="{A7A7202F-CCE2-402B-B2D5-AB43C21D93AD}" type="slidenum">
               <a:rPr lang="en-US" sz="1200" b="0" u="none" strike="noStrike">
                 <a:solidFill>
                   <a:schemeClr val="dk1"/>
@@ -2571,7 +2571,7 @@
                 <a:tab pos="0" algn="l"/>
               </a:tabLst>
             </a:pPr>
-            <a:fld id="{DCE6AF7B-C974-4992-9CC8-18C541E2AB1D}" type="slidenum">
+            <a:fld id="{502551BE-1481-434E-86BA-B64B54D204C5}" type="slidenum">
               <a:rPr lang="en-US" sz="1200" b="0" u="none" strike="noStrike">
                 <a:solidFill>
                   <a:schemeClr val="dk1"/>
@@ -2581,7 +2581,7 @@
                 <a:latin typeface="+mn-lt"/>
                 <a:ea typeface="+mn-ea"/>
               </a:rPr>
-              <a:t>&lt;숫자&gt;</a:t>
+              <a:t>26</a:t>
             </a:fld>
             <a:endParaRPr lang="en-US" sz="1200" b="0" u="none" strike="noStrike">
               <a:solidFill>
@@ -2738,7 +2738,7 @@
                 <a:tab pos="0" algn="l"/>
               </a:tabLst>
             </a:pPr>
-            <a:fld id="{DECA2AC8-7C8E-4D41-9923-6B4B895A4F53}" type="slidenum">
+            <a:fld id="{FCF9D2CD-BEBD-426F-8286-100AB1A01AE0}" type="slidenum">
               <a:rPr lang="en-US" sz="1200" b="0" u="none" strike="noStrike">
                 <a:solidFill>
                   <a:schemeClr val="dk1"/>
@@ -2748,7 +2748,7 @@
                 <a:latin typeface="+mn-lt"/>
                 <a:ea typeface="+mn-ea"/>
               </a:rPr>
-              <a:t>&lt;숫자&gt;</a:t>
+              <a:t>26</a:t>
             </a:fld>
             <a:endParaRPr lang="en-US" sz="1200" b="0" u="none" strike="noStrike">
               <a:solidFill>
@@ -2905,7 +2905,7 @@
                 <a:tab pos="0" algn="l"/>
               </a:tabLst>
             </a:pPr>
-            <a:fld id="{C0AFC83E-0A14-41C0-B012-DA6044CEBB96}" type="slidenum">
+            <a:fld id="{6BA460F6-12C1-4C51-94D1-6626E3AB9339}" type="slidenum">
               <a:rPr lang="en-US" sz="1200" b="0" u="none" strike="noStrike">
                 <a:solidFill>
                   <a:schemeClr val="dk1"/>
@@ -2915,7 +2915,7 @@
                 <a:latin typeface="+mn-lt"/>
                 <a:ea typeface="+mn-ea"/>
               </a:rPr>
-              <a:t>&lt;숫자&gt;</a:t>
+              <a:t>26</a:t>
             </a:fld>
             <a:endParaRPr lang="en-US" sz="1200" b="0" u="none" strike="noStrike">
               <a:solidFill>
@@ -3072,7 +3072,7 @@
                 <a:tab pos="0" algn="l"/>
               </a:tabLst>
             </a:pPr>
-            <a:fld id="{026AA4BC-1345-44C5-9A74-B6530D1878A1}" type="slidenum">
+            <a:fld id="{D785613E-C3B2-43A8-9BC7-E241AE6004F5}" type="slidenum">
               <a:rPr lang="en-US" sz="1200" b="0" u="none" strike="noStrike">
                 <a:solidFill>
                   <a:schemeClr val="dk1"/>
@@ -3082,7 +3082,7 @@
                 <a:latin typeface="+mn-lt"/>
                 <a:ea typeface="+mn-ea"/>
               </a:rPr>
-              <a:t>&lt;숫자&gt;</a:t>
+              <a:t>26</a:t>
             </a:fld>
             <a:endParaRPr lang="en-US" sz="1200" b="0" u="none" strike="noStrike">
               <a:solidFill>
@@ -3239,7 +3239,7 @@
                 <a:tab pos="0" algn="l"/>
               </a:tabLst>
             </a:pPr>
-            <a:fld id="{0DC628C1-0D7F-41DC-BF61-8C0F1CD0435C}" type="slidenum">
+            <a:fld id="{350B6397-7DC1-4434-A8F5-C456B6BFA945}" type="slidenum">
               <a:rPr lang="en-US" sz="1200" b="0" u="none" strike="noStrike">
                 <a:solidFill>
                   <a:schemeClr val="dk1"/>
@@ -3249,7 +3249,7 @@
                 <a:latin typeface="+mn-lt"/>
                 <a:ea typeface="+mn-ea"/>
               </a:rPr>
-              <a:t>&lt;숫자&gt;</a:t>
+              <a:t>26</a:t>
             </a:fld>
             <a:endParaRPr lang="en-US" sz="1200" b="0" u="none" strike="noStrike">
               <a:solidFill>
@@ -3406,7 +3406,7 @@
                 <a:tab pos="0" algn="l"/>
               </a:tabLst>
             </a:pPr>
-            <a:fld id="{6CCABDEC-3C58-421E-AF28-98FE9364E229}" type="slidenum">
+            <a:fld id="{E6954898-E470-4A19-A18D-83063BCCDF85}" type="slidenum">
               <a:rPr lang="en-US" sz="1200" b="0" u="none" strike="noStrike">
                 <a:solidFill>
                   <a:schemeClr val="dk1"/>
@@ -3573,7 +3573,7 @@
                 <a:tab pos="0" algn="l"/>
               </a:tabLst>
             </a:pPr>
-            <a:fld id="{4F73939E-929C-4A6A-913F-C7ACA73962B3}" type="slidenum">
+            <a:fld id="{B8BFF8A9-9444-424F-9014-8BAEA6C8EBDF}" type="slidenum">
               <a:rPr lang="en-US" sz="1200" b="0" u="none" strike="noStrike">
                 <a:solidFill>
                   <a:schemeClr val="dk1"/>
@@ -3740,7 +3740,7 @@
                 <a:tab pos="0" algn="l"/>
               </a:tabLst>
             </a:pPr>
-            <a:fld id="{6210F66E-F53A-4A37-A87A-52494139CFE9}" type="slidenum">
+            <a:fld id="{5DB3F188-ADFE-4B09-9A9A-D86CA1BAA5C0}" type="slidenum">
               <a:rPr lang="en-US" sz="1200" b="0" u="none" strike="noStrike">
                 <a:solidFill>
                   <a:schemeClr val="dk1"/>
@@ -3907,7 +3907,7 @@
                 <a:tab pos="0" algn="l"/>
               </a:tabLst>
             </a:pPr>
-            <a:fld id="{1E176AE9-FCCE-4238-A707-F67B559DAA64}" type="slidenum">
+            <a:fld id="{57EB7585-D713-41DA-8CAD-D1E96A62D9AD}" type="slidenum">
               <a:rPr lang="en-US" sz="1200" b="0" u="none" strike="noStrike">
                 <a:solidFill>
                   <a:schemeClr val="dk1"/>
@@ -4074,7 +4074,7 @@
                 <a:tab pos="0" algn="l"/>
               </a:tabLst>
             </a:pPr>
-            <a:fld id="{072E3F49-C231-44DB-8E43-E3D49B5DB83A}" type="slidenum">
+            <a:fld id="{BCA51A4B-61B4-42F6-B749-287486E92D57}" type="slidenum">
               <a:rPr lang="en-US" sz="1200" b="0" u="none" strike="noStrike">
                 <a:solidFill>
                   <a:schemeClr val="dk1"/>
@@ -4241,7 +4241,7 @@
                 <a:tab pos="0" algn="l"/>
               </a:tabLst>
             </a:pPr>
-            <a:fld id="{2DB4AF0A-9641-4E30-AB28-444B26C8BDEB}" type="slidenum">
+            <a:fld id="{0E125AA6-308B-4302-A2B9-C69F1E5BAB7E}" type="slidenum">
               <a:rPr lang="en-US" sz="1200" b="0" u="none" strike="noStrike">
                 <a:solidFill>
                   <a:schemeClr val="dk1"/>
@@ -4408,7 +4408,7 @@
                 <a:tab pos="0" algn="l"/>
               </a:tabLst>
             </a:pPr>
-            <a:fld id="{CFE4CED9-63F9-4E99-902D-DBDA686C5808}" type="slidenum">
+            <a:fld id="{E5C321DE-9296-4AEE-999B-339A44576CB5}" type="slidenum">
               <a:rPr lang="en-US" sz="1200" b="0" u="none" strike="noStrike">
                 <a:solidFill>
                   <a:schemeClr val="dk1"/>
@@ -4575,7 +4575,7 @@
                 <a:tab pos="0" algn="l"/>
               </a:tabLst>
             </a:pPr>
-            <a:fld id="{88B57B33-9DC9-4BC9-9745-0321C9636D9C}" type="slidenum">
+            <a:fld id="{1F8F1A00-3F49-48E1-8148-ACBD8163D3B6}" type="slidenum">
               <a:rPr lang="en-US" sz="1200" b="0" u="none" strike="noStrike">
                 <a:solidFill>
                   <a:schemeClr val="dk1"/>
@@ -4742,7 +4742,7 @@
                 <a:tab pos="0" algn="l"/>
               </a:tabLst>
             </a:pPr>
-            <a:fld id="{5C10EC3E-0803-4FEA-8C17-D77CE223A460}" type="slidenum">
+            <a:fld id="{929C036D-264D-4870-8E06-E897C0EFD5D7}" type="slidenum">
               <a:rPr lang="en-US" sz="1200" b="0" u="none" strike="noStrike">
                 <a:solidFill>
                   <a:schemeClr val="dk1"/>
@@ -5645,7 +5645,7 @@
                 <a:tab pos="0" algn="l"/>
               </a:tabLst>
             </a:pPr>
-            <a:fld id="{AF96803B-7D1E-46C1-9715-86515DDA5D18}" type="slidenum">
+            <a:fld id="{D39DD149-F4BF-4513-B52B-7D0011AF872F}" type="slidenum">
               <a:rPr lang="en-US" sz="950" b="0" u="none" strike="noStrike">
                 <a:solidFill>
                   <a:srgbClr val="58708E"/>
@@ -6289,7 +6289,7 @@
         <p:txBody>
           <a:bodyPr/>
           <a:p>
-            <a:fld id="{502A7CFB-D438-4F83-BDD3-6B3107AC9447}" type="slidenum">
+            <a:fld id="{05F8E299-4461-4823-A51F-08FFCF681855}" type="slidenum">
               <a:t>&lt;#&gt;</a:t>
             </a:fld>
           </a:p>
@@ -6576,7 +6576,7 @@
                 <a:tab pos="0" algn="l"/>
               </a:tabLst>
             </a:pPr>
-            <a:fld id="{7CC62BF2-B4EA-4072-B10C-0F22250B7A28}" type="slidenum">
+            <a:fld id="{CF977128-DE6B-4221-B2A7-1577E19D184B}" type="slidenum">
               <a:rPr lang="en-US" sz="950" b="0" u="none" strike="noStrike">
                 <a:solidFill>
                   <a:srgbClr val="58708E"/>
@@ -11148,7 +11148,7 @@
               </a:lnSpc>
               <a:buNone/>
             </a:pPr>
-            <a:fld id="{72CF61BC-7ABD-4C79-800F-DDE12A3E7DB1}" type="slidenum">
+            <a:fld id="{C5651ADC-FA69-4DD8-AB90-E3E9710D2F7B}" type="slidenum">
               <a:rPr lang="en-US" sz="650" b="0" u="none" strike="noStrike">
                 <a:solidFill>
                   <a:srgbClr val="A0A8B7"/>
@@ -14418,7 +14418,7 @@
               </a:lnSpc>
               <a:buNone/>
             </a:pPr>
-            <a:fld id="{CFE3C986-6DAC-49CA-9999-B45C466F3E91}" type="slidenum">
+            <a:fld id="{9D9EAFCF-ACB1-49AA-9B0C-279BDEF200C7}" type="slidenum">
               <a:rPr lang="en-US" sz="650" b="0" u="none" strike="noStrike">
                 <a:solidFill>
                   <a:srgbClr val="A0A8B7"/>
@@ -16245,7 +16245,7 @@
                 <a:tab pos="0" algn="l"/>
               </a:tabLst>
             </a:pPr>
-            <a:fld id="{B704A775-6326-45F5-850D-52932E9B9E9E}" type="slidenum">
+            <a:fld id="{EE78D11A-80E3-40D9-B976-2196AE7BF862}" type="slidenum">
               <a:rPr lang="en-US" sz="950" b="0" u="none" strike="noStrike">
                 <a:solidFill>
                   <a:srgbClr val="58708E"/>
@@ -18059,7 +18059,7 @@
                 <a:tab pos="0" algn="l"/>
               </a:tabLst>
             </a:pPr>
-            <a:fld id="{C317B877-4940-4235-B707-622D5ECD083E}" type="slidenum">
+            <a:fld id="{916FF93E-E532-458E-877A-8BD03F85C119}" type="slidenum">
               <a:rPr lang="en-US" sz="950" b="0" u="none" strike="noStrike">
                 <a:solidFill>
                   <a:srgbClr val="58708E"/>
@@ -19873,7 +19873,7 @@
                 <a:tab pos="0" algn="l"/>
               </a:tabLst>
             </a:pPr>
-            <a:fld id="{1B039DC3-D123-4AE7-80A0-B41B5CE6DF33}" type="slidenum">
+            <a:fld id="{BF0595C8-F1DE-4025-8D4B-846D2DDDA65B}" type="slidenum">
               <a:rPr lang="en-US" sz="950" b="0" u="none" strike="noStrike">
                 <a:solidFill>
                   <a:srgbClr val="58708E"/>
@@ -21777,7 +21777,7 @@
                 <a:tab pos="0" algn="l"/>
               </a:tabLst>
             </a:pPr>
-            <a:fld id="{E0E29721-F32A-431C-82CC-03F7ECBAB895}" type="slidenum">
+            <a:fld id="{A0665DAB-5E1C-4E80-945C-2D6F3538DBD7}" type="slidenum">
               <a:rPr lang="en-US" sz="950" b="0" u="none" strike="noStrike">
                 <a:solidFill>
                   <a:srgbClr val="58708E"/>
@@ -23471,7 +23471,7 @@
                 <a:tab pos="0" algn="l"/>
               </a:tabLst>
             </a:pPr>
-            <a:fld id="{1303DAFC-8272-416A-9AFA-72CB6E90A172}" type="slidenum">
+            <a:fld id="{B4E2C368-7553-4A3A-A74C-74030A2B3666}" type="slidenum">
               <a:rPr lang="en-US" sz="950" b="0" u="none" strike="noStrike">
                 <a:solidFill>
                   <a:srgbClr val="58708E"/>
@@ -24882,7 +24882,7 @@
                 <a:tab pos="0" algn="l"/>
               </a:tabLst>
             </a:pPr>
-            <a:fld id="{4FDE7992-CA8B-4378-8B28-9136E863D9DE}" type="slidenum">
+            <a:fld id="{3BA92D91-48CF-4277-894B-AD9A2C23EEB1}" type="slidenum">
               <a:rPr lang="en-US" sz="950" b="0" u="none" strike="noStrike">
                 <a:solidFill>
                   <a:srgbClr val="58708E"/>
@@ -26396,7 +26396,7 @@
                 <a:tab pos="0" algn="l"/>
               </a:tabLst>
             </a:pPr>
-            <a:fld id="{149ACFCE-1FC7-41A7-9779-01B276FCDFCE}" type="slidenum">
+            <a:fld id="{70B27CD3-6D7C-4850-8E22-B941CDCBB7C4}" type="slidenum">
               <a:rPr lang="en-US" sz="950" b="0" u="none" strike="noStrike">
                 <a:solidFill>
                   <a:srgbClr val="58708E"/>
@@ -28067,7 +28067,7 @@
                 <a:tab pos="0" algn="l"/>
               </a:tabLst>
             </a:pPr>
-            <a:fld id="{FF5DEBC8-823D-4558-B9ED-081C46ECA21B}" type="slidenum">
+            <a:fld id="{E325EC77-32A4-4AD3-B801-E5EA55C14D82}" type="slidenum">
               <a:rPr lang="en-US" sz="950" b="0" u="none" strike="noStrike">
                 <a:solidFill>
                   <a:srgbClr val="58708E"/>
@@ -29782,7 +29782,7 @@
                 <a:tab pos="0" algn="l"/>
               </a:tabLst>
             </a:pPr>
-            <a:fld id="{EF8F5D74-74CE-4C3E-8884-3B4FC7A7F98B}" type="slidenum">
+            <a:fld id="{96B84EB5-CE89-4B4C-A258-998D1B96B68B}" type="slidenum">
               <a:rPr lang="en-US" sz="950" b="0" u="none" strike="noStrike">
                 <a:solidFill>
                   <a:srgbClr val="58708E"/>
@@ -31748,7 +31748,7 @@
                 <a:tab pos="0" algn="l"/>
               </a:tabLst>
             </a:pPr>
-            <a:fld id="{AE7A1C9F-FD28-482A-9C0C-19DF83106ED9}" type="slidenum">
+            <a:fld id="{D02E373E-6367-44EB-A76B-7ED52F4A820F}" type="slidenum">
               <a:rPr lang="en-US" sz="950" b="0" u="none" strike="noStrike">
                 <a:solidFill>
                   <a:srgbClr val="58708E"/>
@@ -33706,7 +33706,7 @@
                 <a:tab pos="0" algn="l"/>
               </a:tabLst>
             </a:pPr>
-            <a:fld id="{8574C692-ADEA-425A-B812-836CE4FBCE58}" type="slidenum">
+            <a:fld id="{BBDB8527-5942-4508-87A9-E7541774F91B}" type="slidenum">
               <a:rPr lang="en-US" sz="950" b="0" u="none" strike="noStrike">
                 <a:solidFill>
                   <a:srgbClr val="58708E"/>
@@ -35005,7 +35005,7 @@
                 <a:tab pos="0" algn="l"/>
               </a:tabLst>
             </a:pPr>
-            <a:fld id="{50D11149-4F63-4E48-B872-89DDB6CA7423}" type="slidenum">
+            <a:fld id="{22B887ED-CCCB-40B7-9256-EA39DB5B13E1}" type="slidenum">
               <a:rPr lang="en-US" sz="950" b="0" u="none" strike="noStrike">
                 <a:solidFill>
                   <a:srgbClr val="58708E"/>
@@ -36376,7 +36376,7 @@
                 <a:tab pos="0" algn="l"/>
               </a:tabLst>
             </a:pPr>
-            <a:fld id="{8450906E-7354-400E-B202-3FA0AD5045DF}" type="slidenum">
+            <a:fld id="{6DDE64EC-4FB5-4B77-80D2-E9BF755F207B}" type="slidenum">
               <a:rPr lang="en-US" sz="950" b="0" u="none" strike="noStrike">
                 <a:solidFill>
                   <a:srgbClr val="58708E"/>
@@ -37887,7 +37887,7 @@
                 <a:tab pos="0" algn="l"/>
               </a:tabLst>
             </a:pPr>
-            <a:fld id="{B56A57FB-29F3-41CB-BBAD-1930A0A99BBF}" type="slidenum">
+            <a:fld id="{CD84756C-750D-4E8B-A1EE-0780F9BEB3F7}" type="slidenum">
               <a:rPr lang="en-US" sz="950" b="0" u="none" strike="noStrike">
                 <a:solidFill>
                   <a:srgbClr val="58708E"/>
@@ -39529,7 +39529,7 @@
                 <a:tab pos="0" algn="l"/>
               </a:tabLst>
             </a:pPr>
-            <a:fld id="{B44E2735-DBA2-4319-8FCE-00A2F9C14FB7}" type="slidenum">
+            <a:fld id="{98930B13-1CC1-436C-ADB7-CBE7684969AD}" type="slidenum">
               <a:rPr lang="en-US" sz="950" b="0" u="none" strike="noStrike">
                 <a:solidFill>
                   <a:srgbClr val="58708E"/>
@@ -40402,7 +40402,7 @@
                 <a:tab pos="0" algn="l"/>
               </a:tabLst>
             </a:pPr>
-            <a:fld id="{EBF37807-2E42-4530-A0F6-0A8F160BAB98}" type="slidenum">
+            <a:fld id="{F9196CC1-4D29-4F52-AACE-063891E3043B}" type="slidenum">
               <a:rPr lang="en-US" sz="950" b="0" u="none" strike="noStrike">
                 <a:solidFill>
                   <a:srgbClr val="58708E"/>
@@ -41865,7 +41865,7 @@
                 <a:tab pos="0" algn="l"/>
               </a:tabLst>
             </a:pPr>
-            <a:fld id="{EFFA5829-F056-4044-A35F-4A48832437DB}" type="slidenum">
+            <a:fld id="{A8BF242A-2365-45CB-B408-4B0CD0C66B0D}" type="slidenum">
               <a:rPr lang="en-US" sz="950" b="0" u="none" strike="noStrike">
                 <a:solidFill>
                   <a:srgbClr val="58708E"/>
@@ -43271,7 +43271,7 @@
                 <a:tab pos="0" algn="l"/>
               </a:tabLst>
             </a:pPr>
-            <a:fld id="{F44A4C9E-EA7F-491E-9557-BDB6AAF1F2C9}" type="slidenum">
+            <a:fld id="{A36084E1-5423-4DAE-B3BF-B0C702F1BDF5}" type="slidenum">
               <a:rPr lang="en-US" sz="950" b="0" u="none" strike="noStrike">
                 <a:solidFill>
                   <a:srgbClr val="58708E"/>
@@ -44667,7 +44667,7 @@
                 <a:tab pos="0" algn="l"/>
               </a:tabLst>
             </a:pPr>
-            <a:fld id="{EF2562A0-838B-453A-99D7-4BDFED883E48}" type="slidenum">
+            <a:fld id="{CDD19080-19FD-463C-B57D-F5DCDA3DC12B}" type="slidenum">
               <a:rPr lang="en-US" sz="950" b="0" u="none" strike="noStrike">
                 <a:solidFill>
                   <a:srgbClr val="58708E"/>
@@ -46041,7 +46041,7 @@
                 <a:tab pos="0" algn="l"/>
               </a:tabLst>
             </a:pPr>
-            <a:fld id="{70247EE5-82B6-46CD-BF20-44BE4BCD8B79}" type="slidenum">
+            <a:fld id="{D5B4CFA3-DE84-47B3-A99A-6FFB62C433A8}" type="slidenum">
               <a:rPr lang="en-US" sz="950" b="0" u="none" strike="noStrike">
                 <a:solidFill>
                   <a:srgbClr val="58708E"/>
@@ -48810,7 +48810,7 @@
                 <a:tab pos="0" algn="l"/>
               </a:tabLst>
             </a:pPr>
-            <a:fld id="{2E1CAB68-B471-41A2-B379-358F8CF55DC7}" type="slidenum">
+            <a:fld id="{82B61316-5E6A-4CBB-B551-7500C80D0867}" type="slidenum">
               <a:rPr lang="en-US" sz="950" b="0" u="none" strike="noStrike">
                 <a:solidFill>
                   <a:srgbClr val="58708E"/>
@@ -51258,7 +51258,7 @@
                 <a:tab pos="0" algn="l"/>
               </a:tabLst>
             </a:pPr>
-            <a:fld id="{56662015-4E58-46C6-8534-9529107708B1}" type="slidenum">
+            <a:fld id="{93AEBA6E-1920-4FCD-AC6C-010938B1B076}" type="slidenum">
               <a:rPr lang="en-US" sz="950" b="0" u="none" strike="noStrike">
                 <a:solidFill>
                   <a:srgbClr val="58708E"/>
@@ -52574,7 +52574,7 @@
                 <a:tab pos="0" algn="l"/>
               </a:tabLst>
             </a:pPr>
-            <a:fld id="{3BD07407-491D-44DB-835A-D77F40B2B396}" type="slidenum">
+            <a:fld id="{C37BEDFF-E766-4791-AACD-2BC596CD3F10}" type="slidenum">
               <a:rPr lang="en-US" sz="950" b="0" u="none" strike="noStrike">
                 <a:solidFill>
                   <a:srgbClr val="58708E"/>
